--- a/units/unit06_timing/timing.pptx
+++ b/units/unit06_timing/timing.pptx
@@ -5,7 +5,7 @@
     <p:sldMasterId id="2147483648" r:id="rId1"/>
   </p:sldMasterIdLst>
   <p:notesMasterIdLst>
-    <p:notesMasterId r:id="rId65"/>
+    <p:notesMasterId r:id="rId69"/>
   </p:notesMasterIdLst>
   <p:sldIdLst>
     <p:sldId id="258" r:id="rId2"/>
@@ -70,7 +70,11 @@
     <p:sldId id="372" r:id="rId61"/>
     <p:sldId id="317" r:id="rId62"/>
     <p:sldId id="318" r:id="rId63"/>
-    <p:sldId id="333" r:id="rId64"/>
+    <p:sldId id="373" r:id="rId64"/>
+    <p:sldId id="374" r:id="rId65"/>
+    <p:sldId id="375" r:id="rId66"/>
+    <p:sldId id="376" r:id="rId67"/>
+    <p:sldId id="333" r:id="rId68"/>
   </p:sldIdLst>
   <p:sldSz cx="12192000" cy="6858000"/>
   <p:notesSz cx="7315200" cy="9601200"/>
@@ -270,7 +274,7 @@
           <a:p>
             <a:fld id="{B7D6DDD3-D7E9-488B-B626-1E8285E424D8}" type="datetimeFigureOut">
               <a:rPr lang="en-US" smtClean="0"/>
-              <a:t>3/22/2026</a:t>
+              <a:t>3/23/2026</a:t>
             </a:fld>
             <a:endParaRPr lang="en-US"/>
           </a:p>
@@ -4202,8 +4206,8 @@
           </a:p>
         </p:txBody>
       </p:sp>
-      <mc:AlternateContent xmlns:mc="http://schemas.openxmlformats.org/markup-compatibility/2006">
-        <mc:Choice xmlns:a14="http://schemas.microsoft.com/office/drawing/2010/main" Requires="a14">
+      <mc:AlternateContent xmlns:mc="http://schemas.openxmlformats.org/markup-compatibility/2006" xmlns:a14="http://schemas.microsoft.com/office/drawing/2010/main">
+        <mc:Choice Requires="a14">
           <p:sp>
             <p:nvSpPr>
               <p:cNvPr id="3" name="Content Placeholder 2">
@@ -4336,7 +4340,7 @@
             </p:txBody>
           </p:sp>
         </mc:Choice>
-        <mc:Fallback>
+        <mc:Fallback xmlns="">
           <p:sp>
             <p:nvSpPr>
               <p:cNvPr id="3" name="Content Placeholder 2">
@@ -5262,8 +5266,8 @@
           </a:prstGeom>
         </p:spPr>
       </p:pic>
-      <mc:AlternateContent xmlns:mc="http://schemas.openxmlformats.org/markup-compatibility/2006">
-        <mc:Choice xmlns:a14="http://schemas.microsoft.com/office/drawing/2010/main" Requires="a14">
+      <mc:AlternateContent xmlns:mc="http://schemas.openxmlformats.org/markup-compatibility/2006" xmlns:a14="http://schemas.microsoft.com/office/drawing/2010/main">
+        <mc:Choice Requires="a14">
           <p:graphicFrame>
             <p:nvGraphicFramePr>
               <p:cNvPr id="5" name="Content Placeholder 6">
@@ -5657,7 +5661,7 @@
             </a:graphic>
           </p:graphicFrame>
         </mc:Choice>
-        <mc:Fallback>
+        <mc:Fallback xmlns="">
           <p:graphicFrame>
             <p:nvGraphicFramePr>
               <p:cNvPr id="5" name="Content Placeholder 6">
@@ -5953,8 +5957,8 @@
           </a:p>
         </p:txBody>
       </p:sp>
-      <mc:AlternateContent xmlns:mc="http://schemas.openxmlformats.org/markup-compatibility/2006">
-        <mc:Choice xmlns:a14="http://schemas.microsoft.com/office/drawing/2010/main" Requires="a14">
+      <mc:AlternateContent xmlns:mc="http://schemas.openxmlformats.org/markup-compatibility/2006" xmlns:a14="http://schemas.microsoft.com/office/drawing/2010/main">
+        <mc:Choice Requires="a14">
           <p:sp>
             <p:nvSpPr>
               <p:cNvPr id="3" name="Content Placeholder 2">
@@ -6159,7 +6163,7 @@
             </p:txBody>
           </p:sp>
         </mc:Choice>
-        <mc:Fallback>
+        <mc:Fallback xmlns="">
           <p:sp>
             <p:nvSpPr>
               <p:cNvPr id="3" name="Content Placeholder 2">
@@ -6981,8 +6985,8 @@
           </a:p>
         </p:txBody>
       </p:sp>
-      <mc:AlternateContent xmlns:mc="http://schemas.openxmlformats.org/markup-compatibility/2006">
-        <mc:Choice xmlns:a14="http://schemas.microsoft.com/office/drawing/2010/main" Requires="a14">
+      <mc:AlternateContent xmlns:mc="http://schemas.openxmlformats.org/markup-compatibility/2006" xmlns:a14="http://schemas.microsoft.com/office/drawing/2010/main">
+        <mc:Choice Requires="a14">
           <p:sp>
             <p:nvSpPr>
               <p:cNvPr id="3" name="Content Placeholder 2">
@@ -7161,7 +7165,7 @@
             </p:txBody>
           </p:sp>
         </mc:Choice>
-        <mc:Fallback>
+        <mc:Fallback xmlns="">
           <p:sp>
             <p:nvSpPr>
               <p:cNvPr id="3" name="Content Placeholder 2">
@@ -7572,8 +7576,8 @@
           </a:p>
         </p:txBody>
       </p:sp>
-      <mc:AlternateContent xmlns:mc="http://schemas.openxmlformats.org/markup-compatibility/2006">
-        <mc:Choice xmlns:a14="http://schemas.microsoft.com/office/drawing/2010/main" Requires="a14">
+      <mc:AlternateContent xmlns:mc="http://schemas.openxmlformats.org/markup-compatibility/2006" xmlns:a14="http://schemas.microsoft.com/office/drawing/2010/main">
+        <mc:Choice Requires="a14">
           <p:sp>
             <p:nvSpPr>
               <p:cNvPr id="3" name="Content Placeholder 2">
@@ -7741,7 +7745,7 @@
             </p:txBody>
           </p:sp>
         </mc:Choice>
-        <mc:Fallback>
+        <mc:Fallback xmlns="">
           <p:sp>
             <p:nvSpPr>
               <p:cNvPr id="3" name="Content Placeholder 2">
@@ -10587,210 +10591,169 @@
           <a:p>
             <a:r>
               <a:rPr lang="en-US" dirty="0"/>
-              <a:t>Write </a:t>
-            </a:r>
-            <a:r>
-              <a:rPr lang="en-US" dirty="0" err="1">
+              <a:t>Define </a:t>
+            </a:r>
+            <a:r>
+              <a:rPr lang="en-US" dirty="0">
                 <a:solidFill>
-                  <a:schemeClr val="accent1">
-                    <a:lumMod val="75000"/>
-                  </a:schemeClr>
+                  <a:schemeClr val="accent1"/>
                 </a:solidFill>
               </a:rPr>
-              <a:t>SystemVerilog</a:t>
+              <a:t>undefined</a:t>
+            </a:r>
+            <a:r>
+              <a:rPr lang="en-US" dirty="0"/>
+              <a:t> and </a:t>
             </a:r>
             <a:r>
               <a:rPr lang="en-US" dirty="0">
                 <a:solidFill>
-                  <a:schemeClr val="accent1">
-                    <a:lumMod val="75000"/>
-                  </a:schemeClr>
+                  <a:schemeClr val="accent1"/>
                 </a:solidFill>
               </a:rPr>
-              <a:t> </a:t>
+              <a:t>stable</a:t>
             </a:r>
             <a:r>
               <a:rPr lang="en-US" dirty="0"/>
-              <a:t>descriptions for simple hardware </a:t>
+              <a:t> periods for logical signals</a:t>
+            </a:r>
+          </a:p>
+          <a:p>
+            <a:r>
+              <a:rPr lang="en-US" dirty="0"/>
+              <a:t>Compute the </a:t>
             </a:r>
             <a:r>
               <a:rPr lang="en-US" dirty="0">
                 <a:solidFill>
-                  <a:schemeClr val="accent1">
-                    <a:lumMod val="75000"/>
-                  </a:schemeClr>
+                  <a:schemeClr val="accent1"/>
                 </a:solidFill>
               </a:rPr>
-              <a:t>modules</a:t>
-            </a:r>
-          </a:p>
-          <a:p>
+              <a:t>maximum propagation delay </a:t>
+            </a:r>
             <a:r>
               <a:rPr lang="en-US" dirty="0"/>
-              <a:t>Draw high-level </a:t>
+              <a:t>of combination logics</a:t>
+            </a:r>
+          </a:p>
+          <a:p>
+            <a:pPr lvl="1"/>
+            <a:r>
+              <a:rPr lang="en-US" dirty="0"/>
+              <a:t>Series circuits, conditional, multi-path</a:t>
+            </a:r>
+          </a:p>
+          <a:p>
+            <a:r>
+              <a:rPr lang="en-US" dirty="0"/>
+              <a:t>Perform </a:t>
             </a:r>
             <a:r>
               <a:rPr lang="en-US" dirty="0">
                 <a:solidFill>
-                  <a:schemeClr val="accent1">
-                    <a:lumMod val="75000"/>
-                  </a:schemeClr>
+                  <a:schemeClr val="accent1"/>
                 </a:solidFill>
               </a:rPr>
-              <a:t>block diagram </a:t>
+              <a:t>static timing analysis </a:t>
             </a:r>
             <a:r>
               <a:rPr lang="en-US" dirty="0"/>
-              <a:t>representations of the module implementations</a:t>
-            </a:r>
-          </a:p>
-          <a:p>
+              <a:t>of sequential logic</a:t>
+            </a:r>
+          </a:p>
+          <a:p>
+            <a:pPr lvl="1"/>
             <a:r>
               <a:rPr lang="en-US" dirty="0"/>
-              <a:t>Identify the </a:t>
+              <a:t>Determine the </a:t>
             </a:r>
             <a:r>
               <a:rPr lang="en-US" dirty="0">
                 <a:solidFill>
-                  <a:schemeClr val="accent1">
-                    <a:lumMod val="75000"/>
-                  </a:schemeClr>
+                  <a:schemeClr val="accent1"/>
                 </a:solidFill>
               </a:rPr>
               <a:t>critical path </a:t>
             </a:r>
             <a:r>
               <a:rPr lang="en-US" dirty="0"/>
-              <a:t>and its delay from the block diagram</a:t>
-            </a:r>
-          </a:p>
-          <a:p>
+              <a:t>of a circuit</a:t>
+            </a:r>
+          </a:p>
+          <a:p>
+            <a:pPr lvl="1"/>
             <a:r>
               <a:rPr lang="en-US" dirty="0"/>
-              <a:t>Implement simple functions in synchronous logic</a:t>
-            </a:r>
-          </a:p>
-          <a:p>
-            <a:r>
-              <a:rPr lang="en-US" dirty="0"/>
-              <a:t>Visualize signals in a </a:t>
+              <a:t>Determine </a:t>
             </a:r>
             <a:r>
               <a:rPr lang="en-US" dirty="0">
                 <a:solidFill>
-                  <a:schemeClr val="accent1">
-                    <a:lumMod val="75000"/>
-                  </a:schemeClr>
+                  <a:schemeClr val="accent1"/>
                 </a:solidFill>
               </a:rPr>
-              <a:t>timing diagram</a:t>
-            </a:r>
-          </a:p>
-          <a:p>
+              <a:t>maximum frequency </a:t>
+            </a:r>
             <a:r>
               <a:rPr lang="en-US" dirty="0"/>
-              <a:t>Write a </a:t>
+              <a:t>and detect timing violations</a:t>
+            </a:r>
+          </a:p>
+          <a:p>
+            <a:r>
+              <a:rPr lang="en-US" dirty="0"/>
+              <a:t>Draw </a:t>
             </a:r>
             <a:r>
               <a:rPr lang="en-US" dirty="0">
                 <a:solidFill>
-                  <a:schemeClr val="accent1">
-                    <a:lumMod val="75000"/>
-                  </a:schemeClr>
+                  <a:schemeClr val="accent1"/>
                 </a:solidFill>
               </a:rPr>
-              <a:t>testbench</a:t>
+              <a:t>timing diagrams</a:t>
             </a:r>
             <a:r>
               <a:rPr lang="en-US" dirty="0"/>
-              <a:t> for the hardware modules</a:t>
-            </a:r>
-          </a:p>
-          <a:p>
+              <a:t>, both real and cycle-accurate</a:t>
+            </a:r>
+          </a:p>
+          <a:p>
+            <a:r>
+              <a:rPr lang="en-US" dirty="0"/>
+              <a:t>Describe timing </a:t>
+            </a:r>
             <a:r>
               <a:rPr lang="en-US" dirty="0">
                 <a:solidFill>
-                  <a:schemeClr val="accent1">
-                    <a:lumMod val="75000"/>
-                  </a:schemeClr>
+                  <a:schemeClr val="accent1"/>
                 </a:solidFill>
               </a:rPr>
-              <a:t>Simulate</a:t>
-            </a:r>
+              <a:t>via value-change points</a:t>
+            </a:r>
+          </a:p>
+          <a:p>
             <a:r>
               <a:rPr lang="en-US" dirty="0"/>
-              <a:t>, and </a:t>
+              <a:t>Extract </a:t>
             </a:r>
             <a:r>
               <a:rPr lang="en-US" dirty="0">
                 <a:solidFill>
-                  <a:schemeClr val="accent1">
-                    <a:lumMod val="75000"/>
-                  </a:schemeClr>
+                  <a:schemeClr val="accent1"/>
                 </a:solidFill>
               </a:rPr>
-              <a:t>synthesize</a:t>
+              <a:t>VCD files </a:t>
             </a:r>
             <a:r>
               <a:rPr lang="en-US" dirty="0"/>
-              <a:t> the </a:t>
-            </a:r>
-            <a:r>
-              <a:rPr lang="en-US" dirty="0" err="1"/>
-              <a:t>SystemVerilog</a:t>
-            </a:r>
-            <a:r>
-              <a:rPr lang="en-US" dirty="0"/>
-              <a:t> using </a:t>
-            </a:r>
-            <a:r>
-              <a:rPr lang="en-US" dirty="0" err="1">
-                <a:solidFill>
-                  <a:schemeClr val="accent1">
-                    <a:lumMod val="75000"/>
-                  </a:schemeClr>
-                </a:solidFill>
-              </a:rPr>
-              <a:t>Vivado</a:t>
-            </a:r>
-            <a:r>
-              <a:rPr lang="en-US" dirty="0"/>
-              <a:t> tools</a:t>
-            </a:r>
-          </a:p>
-          <a:p>
-            <a:r>
-              <a:rPr lang="en-US" dirty="0"/>
-              <a:t>Extract </a:t>
-            </a:r>
-            <a:r>
-              <a:rPr lang="en-US" dirty="0">
-                <a:solidFill>
-                  <a:schemeClr val="accent1">
-                    <a:lumMod val="75000"/>
-                  </a:schemeClr>
-                </a:solidFill>
-              </a:rPr>
-              <a:t>value-change dump </a:t>
-            </a:r>
-            <a:r>
-              <a:rPr lang="en-US" dirty="0"/>
-              <a:t>(VCD) files and </a:t>
-            </a:r>
-            <a:r>
-              <a:rPr lang="en-US" dirty="0">
-                <a:solidFill>
-                  <a:schemeClr val="accent1">
-                    <a:lumMod val="75000"/>
-                  </a:schemeClr>
-                </a:solidFill>
-              </a:rPr>
-              <a:t>synthesis reports </a:t>
-            </a:r>
-            <a:r>
-              <a:rPr lang="en-US" dirty="0"/>
-              <a:t>and process them in python </a:t>
-            </a:r>
+              <a:t>from Vitis and display timing information in python</a:t>
+            </a:r>
+          </a:p>
+          <a:p>
+            <a:endParaRPr lang="en-US" dirty="0"/>
+          </a:p>
+          <a:p>
+            <a:endParaRPr lang="en-US" dirty="0"/>
           </a:p>
           <a:p>
             <a:endParaRPr lang="en-US" dirty="0"/>
@@ -11093,6 +11056,37 @@
                                           <p:spTgt spid="3">
                                             <p:txEl>
                                               <p:pRg st="7" end="7"/>
+                                            </p:txEl>
+                                          </p:spTgt>
+                                        </p:tgtEl>
+                                        <p:attrNameLst>
+                                          <p:attrName>style.visibility</p:attrName>
+                                        </p:attrNameLst>
+                                      </p:cBhvr>
+                                      <p:to>
+                                        <p:strVal val="visible"/>
+                                      </p:to>
+                                    </p:set>
+                                  </p:childTnLst>
+                                </p:cTn>
+                              </p:par>
+                              <p:par>
+                                <p:cTn id="21" presetID="1" presetClass="entr" presetSubtype="0" fill="hold" nodeType="withEffect">
+                                  <p:stCondLst>
+                                    <p:cond delay="0"/>
+                                  </p:stCondLst>
+                                  <p:childTnLst>
+                                    <p:set>
+                                      <p:cBhvr>
+                                        <p:cTn id="22" dur="1" fill="hold">
+                                          <p:stCondLst>
+                                            <p:cond delay="0"/>
+                                          </p:stCondLst>
+                                        </p:cTn>
+                                        <p:tgtEl>
+                                          <p:spTgt spid="3">
+                                            <p:txEl>
+                                              <p:pRg st="8" end="8"/>
                                             </p:txEl>
                                           </p:spTgt>
                                         </p:tgtEl>
@@ -12165,8 +12159,8 @@
           </a:prstGeom>
         </p:spPr>
       </p:pic>
-      <mc:AlternateContent xmlns:mc="http://schemas.openxmlformats.org/markup-compatibility/2006">
-        <mc:Choice xmlns:a14="http://schemas.microsoft.com/office/drawing/2010/main" Requires="a14">
+      <mc:AlternateContent xmlns:mc="http://schemas.openxmlformats.org/markup-compatibility/2006" xmlns:a14="http://schemas.microsoft.com/office/drawing/2010/main">
+        <mc:Choice Requires="a14">
           <p:sp>
             <p:nvSpPr>
               <p:cNvPr id="9" name="Content Placeholder 2">
@@ -12509,7 +12503,7 @@
             </p:txBody>
           </p:sp>
         </mc:Choice>
-        <mc:Fallback>
+        <mc:Fallback xmlns="">
           <p:sp>
             <p:nvSpPr>
               <p:cNvPr id="9" name="Content Placeholder 2">
@@ -12875,8 +12869,8 @@
           </a:prstGeom>
         </p:spPr>
       </p:pic>
-      <mc:AlternateContent xmlns:mc="http://schemas.openxmlformats.org/markup-compatibility/2006">
-        <mc:Choice xmlns:a14="http://schemas.microsoft.com/office/drawing/2010/main" Requires="a14">
+      <mc:AlternateContent xmlns:mc="http://schemas.openxmlformats.org/markup-compatibility/2006" xmlns:a14="http://schemas.microsoft.com/office/drawing/2010/main">
+        <mc:Choice Requires="a14">
           <p:sp>
             <p:nvSpPr>
               <p:cNvPr id="9" name="Content Placeholder 2">
@@ -13284,7 +13278,7 @@
             </p:txBody>
           </p:sp>
         </mc:Choice>
-        <mc:Fallback>
+        <mc:Fallback xmlns="">
           <p:sp>
             <p:nvSpPr>
               <p:cNvPr id="9" name="Content Placeholder 2">
@@ -13665,8 +13659,8 @@
           </a:p>
         </p:txBody>
       </p:sp>
-      <mc:AlternateContent xmlns:mc="http://schemas.openxmlformats.org/markup-compatibility/2006">
-        <mc:Choice xmlns:a14="http://schemas.microsoft.com/office/drawing/2010/main" Requires="a14">
+      <mc:AlternateContent xmlns:mc="http://schemas.openxmlformats.org/markup-compatibility/2006" xmlns:a14="http://schemas.microsoft.com/office/drawing/2010/main">
+        <mc:Choice Requires="a14">
           <p:sp>
             <p:nvSpPr>
               <p:cNvPr id="9" name="Content Placeholder 2">
@@ -14205,7 +14199,7 @@
             </p:txBody>
           </p:sp>
         </mc:Choice>
-        <mc:Fallback>
+        <mc:Fallback xmlns="">
           <p:sp>
             <p:nvSpPr>
               <p:cNvPr id="9" name="Content Placeholder 2">
@@ -15504,8 +15498,8 @@
           </a:p>
         </p:txBody>
       </p:sp>
-      <mc:AlternateContent xmlns:mc="http://schemas.openxmlformats.org/markup-compatibility/2006">
-        <mc:Choice xmlns:a14="http://schemas.microsoft.com/office/drawing/2010/main" Requires="a14">
+      <mc:AlternateContent xmlns:mc="http://schemas.openxmlformats.org/markup-compatibility/2006" xmlns:a14="http://schemas.microsoft.com/office/drawing/2010/main">
+        <mc:Choice Requires="a14">
           <p:sp>
             <p:nvSpPr>
               <p:cNvPr id="9" name="Content Placeholder 2">
@@ -16035,7 +16029,7 @@
             </p:txBody>
           </p:sp>
         </mc:Choice>
-        <mc:Fallback>
+        <mc:Fallback xmlns="">
           <p:sp>
             <p:nvSpPr>
               <p:cNvPr id="9" name="Content Placeholder 2">
@@ -16516,8 +16510,8 @@
           </a:p>
         </p:txBody>
       </p:sp>
-      <mc:AlternateContent xmlns:mc="http://schemas.openxmlformats.org/markup-compatibility/2006">
-        <mc:Choice xmlns:a14="http://schemas.microsoft.com/office/drawing/2010/main" Requires="a14">
+      <mc:AlternateContent xmlns:mc="http://schemas.openxmlformats.org/markup-compatibility/2006" xmlns:a14="http://schemas.microsoft.com/office/drawing/2010/main">
+        <mc:Choice Requires="a14">
           <p:sp>
             <p:nvSpPr>
               <p:cNvPr id="9" name="Content Placeholder 2">
@@ -17184,7 +17178,7 @@
             </p:txBody>
           </p:sp>
         </mc:Choice>
-        <mc:Fallback>
+        <mc:Fallback xmlns="">
           <p:sp>
             <p:nvSpPr>
               <p:cNvPr id="9" name="Content Placeholder 2">
@@ -19737,8 +19731,8 @@
           </a:p>
         </p:txBody>
       </p:sp>
-      <mc:AlternateContent xmlns:mc="http://schemas.openxmlformats.org/markup-compatibility/2006">
-        <mc:Choice xmlns:a14="http://schemas.microsoft.com/office/drawing/2010/main" Requires="a14">
+      <mc:AlternateContent xmlns:mc="http://schemas.openxmlformats.org/markup-compatibility/2006" xmlns:a14="http://schemas.microsoft.com/office/drawing/2010/main">
+        <mc:Choice Requires="a14">
           <p:sp>
             <p:nvSpPr>
               <p:cNvPr id="3" name="Content Placeholder 2">
@@ -20001,7 +19995,7 @@
             </p:txBody>
           </p:sp>
         </mc:Choice>
-        <mc:Fallback>
+        <mc:Fallback xmlns="">
           <p:sp>
             <p:nvSpPr>
               <p:cNvPr id="3" name="Content Placeholder 2">
@@ -20775,8 +20769,8 @@
           </a:p>
         </p:txBody>
       </p:sp>
-      <mc:AlternateContent xmlns:mc="http://schemas.openxmlformats.org/markup-compatibility/2006">
-        <mc:Choice xmlns:a14="http://schemas.microsoft.com/office/drawing/2010/main" Requires="a14">
+      <mc:AlternateContent xmlns:mc="http://schemas.openxmlformats.org/markup-compatibility/2006" xmlns:a14="http://schemas.microsoft.com/office/drawing/2010/main">
+        <mc:Choice Requires="a14">
           <p:sp>
             <p:nvSpPr>
               <p:cNvPr id="3" name="Content Placeholder 2">
@@ -20892,7 +20886,7 @@
             </p:txBody>
           </p:sp>
         </mc:Choice>
-        <mc:Fallback>
+        <mc:Fallback xmlns="">
           <p:sp>
             <p:nvSpPr>
               <p:cNvPr id="3" name="Content Placeholder 2">
@@ -21530,8 +21524,8 @@
           </a:p>
         </p:txBody>
       </p:sp>
-      <mc:AlternateContent xmlns:mc="http://schemas.openxmlformats.org/markup-compatibility/2006">
-        <mc:Choice xmlns:a14="http://schemas.microsoft.com/office/drawing/2010/main" Requires="a14">
+      <mc:AlternateContent xmlns:mc="http://schemas.openxmlformats.org/markup-compatibility/2006" xmlns:a14="http://schemas.microsoft.com/office/drawing/2010/main">
+        <mc:Choice Requires="a14">
           <p:sp>
             <p:nvSpPr>
               <p:cNvPr id="3" name="Content Placeholder 2">
@@ -22240,7 +22234,7 @@
             </p:txBody>
           </p:sp>
         </mc:Choice>
-        <mc:Fallback>
+        <mc:Fallback xmlns="">
           <p:sp>
             <p:nvSpPr>
               <p:cNvPr id="3" name="Content Placeholder 2">
@@ -22467,8 +22461,8 @@
           </a:p>
         </p:txBody>
       </p:sp>
-      <mc:AlternateContent xmlns:mc="http://schemas.openxmlformats.org/markup-compatibility/2006">
-        <mc:Choice xmlns:a14="http://schemas.microsoft.com/office/drawing/2010/main" Requires="a14">
+      <mc:AlternateContent xmlns:mc="http://schemas.openxmlformats.org/markup-compatibility/2006" xmlns:a14="http://schemas.microsoft.com/office/drawing/2010/main">
+        <mc:Choice Requires="a14">
           <p:sp>
             <p:nvSpPr>
               <p:cNvPr id="3" name="Content Placeholder 2">
@@ -23171,7 +23165,7 @@
             </p:txBody>
           </p:sp>
         </mc:Choice>
-        <mc:Fallback>
+        <mc:Fallback xmlns="">
           <p:sp>
             <p:nvSpPr>
               <p:cNvPr id="3" name="Content Placeholder 2">
@@ -23960,8 +23954,8 @@
           </a:p>
         </p:txBody>
       </p:sp>
-      <mc:AlternateContent xmlns:mc="http://schemas.openxmlformats.org/markup-compatibility/2006">
-        <mc:Choice xmlns:a14="http://schemas.microsoft.com/office/drawing/2010/main" Requires="a14">
+      <mc:AlternateContent xmlns:mc="http://schemas.openxmlformats.org/markup-compatibility/2006" xmlns:a14="http://schemas.microsoft.com/office/drawing/2010/main">
+        <mc:Choice Requires="a14">
           <p:sp>
             <p:nvSpPr>
               <p:cNvPr id="3" name="Content Placeholder 2">
@@ -24124,7 +24118,9 @@
                       </m:den>
                     </m:f>
                     <m:r>
-                      <a:rPr lang="en-US" b="0" i="0" smtClean="0"/>
+                      <a:rPr lang="en-US" b="0" i="0" smtClean="0">
+                        <a:latin typeface="Cambria Math" panose="02040503050406030204" pitchFamily="18" charset="0"/>
+                      </a:rPr>
                       <m:t>=</m:t>
                     </m:r>
                   </m:oMath>
@@ -24313,7 +24309,7 @@
             </p:txBody>
           </p:sp>
         </mc:Choice>
-        <mc:Fallback>
+        <mc:Fallback xmlns="">
           <p:sp>
             <p:nvSpPr>
               <p:cNvPr id="3" name="Content Placeholder 2">
@@ -24382,8 +24378,8 @@
           </a:p>
         </p:txBody>
       </p:sp>
-      <mc:AlternateContent xmlns:mc="http://schemas.openxmlformats.org/markup-compatibility/2006">
-        <mc:Choice xmlns:a14="http://schemas.microsoft.com/office/drawing/2010/main" Requires="a14">
+      <mc:AlternateContent xmlns:mc="http://schemas.openxmlformats.org/markup-compatibility/2006" xmlns:a14="http://schemas.microsoft.com/office/drawing/2010/main">
+        <mc:Choice Requires="a14">
           <p:sp>
             <p:nvSpPr>
               <p:cNvPr id="6" name="Rectangle: Rounded Corners 5">
@@ -24634,7 +24630,7 @@
             </p:txBody>
           </p:sp>
         </mc:Choice>
-        <mc:Fallback>
+        <mc:Fallback xmlns="">
           <p:sp>
             <p:nvSpPr>
               <p:cNvPr id="6" name="Rectangle: Rounded Corners 5">
@@ -25085,8 +25081,8 @@
           </a:p>
         </p:txBody>
       </p:sp>
-      <mc:AlternateContent xmlns:mc="http://schemas.openxmlformats.org/markup-compatibility/2006">
-        <mc:Choice xmlns:a14="http://schemas.microsoft.com/office/drawing/2010/main" Requires="a14">
+      <mc:AlternateContent xmlns:mc="http://schemas.openxmlformats.org/markup-compatibility/2006" xmlns:a14="http://schemas.microsoft.com/office/drawing/2010/main">
+        <mc:Choice Requires="a14">
           <p:graphicFrame>
             <p:nvGraphicFramePr>
               <p:cNvPr id="7" name="Table 6">
@@ -25567,7 +25563,7 @@
             </a:graphic>
           </p:graphicFrame>
         </mc:Choice>
-        <mc:Fallback>
+        <mc:Fallback xmlns="">
           <p:graphicFrame>
             <p:nvGraphicFramePr>
               <p:cNvPr id="7" name="Table 6">
@@ -26233,8 +26229,8 @@
           </a:p>
         </p:txBody>
       </p:sp>
-      <mc:AlternateContent xmlns:mc="http://schemas.openxmlformats.org/markup-compatibility/2006">
-        <mc:Choice xmlns:a14="http://schemas.microsoft.com/office/drawing/2010/main" Requires="a14">
+      <mc:AlternateContent xmlns:mc="http://schemas.openxmlformats.org/markup-compatibility/2006" xmlns:a14="http://schemas.microsoft.com/office/drawing/2010/main">
+        <mc:Choice Requires="a14">
           <p:sp>
             <p:nvSpPr>
               <p:cNvPr id="3" name="Content Placeholder 2">
@@ -26610,7 +26606,7 @@
             </p:txBody>
           </p:sp>
         </mc:Choice>
-        <mc:Fallback>
+        <mc:Fallback xmlns="">
           <p:sp>
             <p:nvSpPr>
               <p:cNvPr id="3" name="Content Placeholder 2">
@@ -26683,8 +26679,8 @@
           </a:p>
         </p:txBody>
       </p:sp>
-      <mc:AlternateContent xmlns:mc="http://schemas.openxmlformats.org/markup-compatibility/2006">
-        <mc:Choice xmlns:a14="http://schemas.microsoft.com/office/drawing/2010/main" Requires="a14">
+      <mc:AlternateContent xmlns:mc="http://schemas.openxmlformats.org/markup-compatibility/2006" xmlns:a14="http://schemas.microsoft.com/office/drawing/2010/main">
+        <mc:Choice Requires="a14">
           <p:graphicFrame>
             <p:nvGraphicFramePr>
               <p:cNvPr id="7" name="Table 6">
@@ -27041,7 +27037,7 @@
             </a:graphic>
           </p:graphicFrame>
         </mc:Choice>
-        <mc:Fallback>
+        <mc:Fallback xmlns="">
           <p:graphicFrame>
             <p:nvGraphicFramePr>
               <p:cNvPr id="7" name="Table 6">
@@ -27416,8 +27412,8 @@
           </a:p>
         </p:txBody>
       </p:sp>
-      <mc:AlternateContent xmlns:mc="http://schemas.openxmlformats.org/markup-compatibility/2006">
-        <mc:Choice xmlns:a14="http://schemas.microsoft.com/office/drawing/2010/main" Requires="a14">
+      <mc:AlternateContent xmlns:mc="http://schemas.openxmlformats.org/markup-compatibility/2006" xmlns:a14="http://schemas.microsoft.com/office/drawing/2010/main">
+        <mc:Choice Requires="a14">
           <p:sp>
             <p:nvSpPr>
               <p:cNvPr id="3" name="Content Placeholder 2">
@@ -27569,7 +27565,7 @@
             </p:txBody>
           </p:sp>
         </mc:Choice>
-        <mc:Fallback>
+        <mc:Fallback xmlns="">
           <p:sp>
             <p:nvSpPr>
               <p:cNvPr id="3" name="Content Placeholder 2">
@@ -28042,8 +28038,8 @@
           </a:p>
         </p:txBody>
       </p:sp>
-      <mc:AlternateContent xmlns:mc="http://schemas.openxmlformats.org/markup-compatibility/2006">
-        <mc:Choice xmlns:a14="http://schemas.microsoft.com/office/drawing/2010/main" Requires="a14">
+      <mc:AlternateContent xmlns:mc="http://schemas.openxmlformats.org/markup-compatibility/2006" xmlns:a14="http://schemas.microsoft.com/office/drawing/2010/main">
+        <mc:Choice Requires="a14">
           <p:sp>
             <p:nvSpPr>
               <p:cNvPr id="3" name="Content Placeholder 2">
@@ -28214,7 +28210,7 @@
             </p:txBody>
           </p:sp>
         </mc:Choice>
-        <mc:Fallback>
+        <mc:Fallback xmlns="">
           <p:sp>
             <p:nvSpPr>
               <p:cNvPr id="3" name="Content Placeholder 2">
@@ -28630,8 +28626,8 @@
           </a:fontRef>
         </p:style>
       </p:cxnSp>
-      <mc:AlternateContent xmlns:mc="http://schemas.openxmlformats.org/markup-compatibility/2006">
-        <mc:Choice xmlns:a14="http://schemas.microsoft.com/office/drawing/2010/main" Requires="a14">
+      <mc:AlternateContent xmlns:mc="http://schemas.openxmlformats.org/markup-compatibility/2006" xmlns:a14="http://schemas.microsoft.com/office/drawing/2010/main">
+        <mc:Choice Requires="a14">
           <p:sp>
             <p:nvSpPr>
               <p:cNvPr id="32" name="TextBox 31">
@@ -28660,6 +28656,7 @@
               </a:bodyPr>
               <a:lstStyle/>
               <a:p>
+                <a:pPr/>
                 <a14:m>
                   <m:oMathPara xmlns:m="http://schemas.openxmlformats.org/officeDocument/2006/math">
                     <m:oMathParaPr>
@@ -28730,7 +28727,7 @@
             </p:txBody>
           </p:sp>
         </mc:Choice>
-        <mc:Fallback>
+        <mc:Fallback xmlns="">
           <p:sp>
             <p:nvSpPr>
               <p:cNvPr id="32" name="TextBox 31">
@@ -28775,8 +28772,8 @@
           </p:sp>
         </mc:Fallback>
       </mc:AlternateContent>
-      <mc:AlternateContent xmlns:mc="http://schemas.openxmlformats.org/markup-compatibility/2006">
-        <mc:Choice xmlns:a14="http://schemas.microsoft.com/office/drawing/2010/main" Requires="a14">
+      <mc:AlternateContent xmlns:mc="http://schemas.openxmlformats.org/markup-compatibility/2006" xmlns:a14="http://schemas.microsoft.com/office/drawing/2010/main">
+        <mc:Choice Requires="a14">
           <p:sp>
             <p:nvSpPr>
               <p:cNvPr id="33" name="TextBox 32">
@@ -28805,6 +28802,7 @@
               </a:bodyPr>
               <a:lstStyle/>
               <a:p>
+                <a:pPr/>
                 <a14:m>
                   <m:oMathPara xmlns:m="http://schemas.openxmlformats.org/officeDocument/2006/math">
                     <m:oMathParaPr>
@@ -28857,7 +28855,7 @@
             </p:txBody>
           </p:sp>
         </mc:Choice>
-        <mc:Fallback>
+        <mc:Fallback xmlns="">
           <p:sp>
             <p:nvSpPr>
               <p:cNvPr id="33" name="TextBox 32">
@@ -29458,8 +29456,8 @@
           </a:fontRef>
         </p:style>
       </p:cxnSp>
-      <mc:AlternateContent xmlns:mc="http://schemas.openxmlformats.org/markup-compatibility/2006">
-        <mc:Choice xmlns:a14="http://schemas.microsoft.com/office/drawing/2010/main" Requires="a14">
+      <mc:AlternateContent xmlns:mc="http://schemas.openxmlformats.org/markup-compatibility/2006" xmlns:a14="http://schemas.microsoft.com/office/drawing/2010/main">
+        <mc:Choice Requires="a14">
           <p:sp>
             <p:nvSpPr>
               <p:cNvPr id="5" name="TextBox 4">
@@ -29488,6 +29486,7 @@
               </a:bodyPr>
               <a:lstStyle/>
               <a:p>
+                <a:pPr/>
                 <a14:m>
                   <m:oMathPara xmlns:m="http://schemas.openxmlformats.org/officeDocument/2006/math">
                     <m:oMathParaPr>
@@ -29558,7 +29557,7 @@
             </p:txBody>
           </p:sp>
         </mc:Choice>
-        <mc:Fallback>
+        <mc:Fallback xmlns="">
           <p:sp>
             <p:nvSpPr>
               <p:cNvPr id="5" name="TextBox 4">
@@ -29603,8 +29602,8 @@
           </p:sp>
         </mc:Fallback>
       </mc:AlternateContent>
-      <mc:AlternateContent xmlns:mc="http://schemas.openxmlformats.org/markup-compatibility/2006">
-        <mc:Choice xmlns:a14="http://schemas.microsoft.com/office/drawing/2010/main" Requires="a14">
+      <mc:AlternateContent xmlns:mc="http://schemas.openxmlformats.org/markup-compatibility/2006" xmlns:a14="http://schemas.microsoft.com/office/drawing/2010/main">
+        <mc:Choice Requires="a14">
           <p:sp>
             <p:nvSpPr>
               <p:cNvPr id="7" name="TextBox 6">
@@ -29633,6 +29632,7 @@
               </a:bodyPr>
               <a:lstStyle/>
               <a:p>
+                <a:pPr/>
                 <a14:m>
                   <m:oMathPara xmlns:m="http://schemas.openxmlformats.org/officeDocument/2006/math">
                     <m:oMathParaPr>
@@ -29685,7 +29685,7 @@
             </p:txBody>
           </p:sp>
         </mc:Choice>
-        <mc:Fallback>
+        <mc:Fallback xmlns="">
           <p:sp>
             <p:nvSpPr>
               <p:cNvPr id="7" name="TextBox 6">
@@ -29796,8 +29796,8 @@
           </a:p>
         </p:txBody>
       </p:sp>
-      <mc:AlternateContent xmlns:mc="http://schemas.openxmlformats.org/markup-compatibility/2006">
-        <mc:Choice xmlns:a14="http://schemas.microsoft.com/office/drawing/2010/main" Requires="a14">
+      <mc:AlternateContent xmlns:mc="http://schemas.openxmlformats.org/markup-compatibility/2006" xmlns:a14="http://schemas.microsoft.com/office/drawing/2010/main">
+        <mc:Choice Requires="a14">
           <p:sp>
             <p:nvSpPr>
               <p:cNvPr id="3" name="Content Placeholder 2">
@@ -29910,7 +29910,7 @@
             </p:txBody>
           </p:sp>
         </mc:Choice>
-        <mc:Fallback>
+        <mc:Fallback xmlns="">
           <p:sp>
             <p:nvSpPr>
               <p:cNvPr id="3" name="Content Placeholder 2">
@@ -30097,8 +30097,8 @@
           </a:p>
         </p:txBody>
       </p:sp>
-      <mc:AlternateContent xmlns:mc="http://schemas.openxmlformats.org/markup-compatibility/2006">
-        <mc:Choice xmlns:a14="http://schemas.microsoft.com/office/drawing/2010/main" Requires="a14">
+      <mc:AlternateContent xmlns:mc="http://schemas.openxmlformats.org/markup-compatibility/2006" xmlns:a14="http://schemas.microsoft.com/office/drawing/2010/main">
+        <mc:Choice Requires="a14">
           <p:sp>
             <p:nvSpPr>
               <p:cNvPr id="8" name="TextBox 7">
@@ -30149,7 +30149,7 @@
             </p:txBody>
           </p:sp>
         </mc:Choice>
-        <mc:Fallback>
+        <mc:Fallback xmlns="">
           <p:sp>
             <p:nvSpPr>
               <p:cNvPr id="8" name="TextBox 7">
@@ -31021,8 +31021,8 @@
           </a:prstGeom>
         </p:spPr>
       </p:pic>
-      <mc:AlternateContent xmlns:mc="http://schemas.openxmlformats.org/markup-compatibility/2006">
-        <mc:Choice xmlns:a14="http://schemas.microsoft.com/office/drawing/2010/main" Requires="a14">
+      <mc:AlternateContent xmlns:mc="http://schemas.openxmlformats.org/markup-compatibility/2006" xmlns:a14="http://schemas.microsoft.com/office/drawing/2010/main">
+        <mc:Choice Requires="a14">
           <p:graphicFrame>
             <p:nvGraphicFramePr>
               <p:cNvPr id="5" name="Content Placeholder 6">
@@ -31480,7 +31480,7 @@
             </a:graphic>
           </p:graphicFrame>
         </mc:Choice>
-        <mc:Fallback>
+        <mc:Fallback xmlns="">
           <p:graphicFrame>
             <p:nvGraphicFramePr>
               <p:cNvPr id="5" name="Content Placeholder 6">
@@ -40095,8 +40095,8 @@
           </a:p>
         </p:txBody>
       </p:sp>
-      <mc:AlternateContent xmlns:mc="http://schemas.openxmlformats.org/markup-compatibility/2006">
-        <mc:Choice xmlns:a14="http://schemas.microsoft.com/office/drawing/2010/main" Requires="a14">
+      <mc:AlternateContent xmlns:mc="http://schemas.openxmlformats.org/markup-compatibility/2006" xmlns:a14="http://schemas.microsoft.com/office/drawing/2010/main">
+        <mc:Choice Requires="a14">
           <p:sp>
             <p:nvSpPr>
               <p:cNvPr id="5" name="Rectangle: Rounded Corners 4">
@@ -40849,7 +40849,7 @@
             </p:txBody>
           </p:sp>
         </mc:Choice>
-        <mc:Fallback>
+        <mc:Fallback xmlns="">
           <p:sp>
             <p:nvSpPr>
               <p:cNvPr id="5" name="Rectangle: Rounded Corners 4">
@@ -40952,8 +40952,8 @@
           </a:p>
         </p:txBody>
       </p:sp>
-      <mc:AlternateContent xmlns:mc="http://schemas.openxmlformats.org/markup-compatibility/2006">
-        <mc:Choice xmlns:a14="http://schemas.microsoft.com/office/drawing/2010/main" Requires="a14">
+      <mc:AlternateContent xmlns:mc="http://schemas.openxmlformats.org/markup-compatibility/2006" xmlns:a14="http://schemas.microsoft.com/office/drawing/2010/main">
+        <mc:Choice Requires="a14">
           <p:sp>
             <p:nvSpPr>
               <p:cNvPr id="3" name="Content Placeholder 2">
@@ -41055,7 +41055,7 @@
             </p:txBody>
           </p:sp>
         </mc:Choice>
-        <mc:Fallback>
+        <mc:Fallback xmlns="">
           <p:sp>
             <p:nvSpPr>
               <p:cNvPr id="3" name="Content Placeholder 2">
@@ -41189,6 +41189,1064 @@
           <p:cNvPr id="2" name="Title 1">
             <a:extLst>
               <a:ext uri="{FF2B5EF4-FFF2-40B4-BE49-F238E27FC236}">
+                <a16:creationId xmlns:a16="http://schemas.microsoft.com/office/drawing/2014/main" id="{4825952E-E973-AEE7-DA48-4D813A3F617B}"/>
+              </a:ext>
+            </a:extLst>
+          </p:cNvPr>
+          <p:cNvSpPr>
+            <a:spLocks noGrp="1"/>
+          </p:cNvSpPr>
+          <p:nvPr>
+            <p:ph type="title"/>
+          </p:nvPr>
+        </p:nvSpPr>
+        <p:spPr/>
+        <p:txBody>
+          <a:bodyPr/>
+          <a:lstStyle/>
+          <a:p>
+            <a:r>
+              <a:rPr lang="en-US" dirty="0"/>
+              <a:t>Viewing Waveforms in </a:t>
+            </a:r>
+            <a:r>
+              <a:rPr lang="en-US" dirty="0" err="1"/>
+              <a:t>Vivado</a:t>
+            </a:r>
+            <a:endParaRPr lang="en-US" dirty="0"/>
+          </a:p>
+        </p:txBody>
+      </p:sp>
+      <p:sp>
+        <p:nvSpPr>
+          <p:cNvPr id="3" name="Content Placeholder 2">
+            <a:extLst>
+              <a:ext uri="{FF2B5EF4-FFF2-40B4-BE49-F238E27FC236}">
+                <a16:creationId xmlns:a16="http://schemas.microsoft.com/office/drawing/2014/main" id="{95338B56-A112-EB7E-1CAE-143AB7CA33A3}"/>
+              </a:ext>
+            </a:extLst>
+          </p:cNvPr>
+          <p:cNvSpPr>
+            <a:spLocks noGrp="1"/>
+          </p:cNvSpPr>
+          <p:nvPr>
+            <p:ph idx="1"/>
+          </p:nvPr>
+        </p:nvSpPr>
+        <p:spPr/>
+        <p:txBody>
+          <a:bodyPr/>
+          <a:lstStyle/>
+          <a:p>
+            <a:r>
+              <a:rPr lang="en-US" dirty="0" err="1"/>
+              <a:t>Vivado</a:t>
+            </a:r>
+            <a:r>
+              <a:rPr lang="en-US" dirty="0"/>
+              <a:t> has a built-in waveform viewer</a:t>
+            </a:r>
+          </a:p>
+          <a:p>
+            <a:r>
+              <a:rPr lang="en-US" dirty="0"/>
+              <a:t>But no way to download the data</a:t>
+            </a:r>
+          </a:p>
+          <a:p>
+            <a:pPr lvl="1"/>
+            <a:r>
+              <a:rPr lang="en-US" dirty="0"/>
+              <a:t>Stored in a proprietary format</a:t>
+            </a:r>
+          </a:p>
+          <a:p>
+            <a:r>
+              <a:rPr lang="en-US" dirty="0"/>
+              <a:t>Can only be seen in GUI</a:t>
+            </a:r>
+          </a:p>
+          <a:p>
+            <a:r>
+              <a:rPr lang="en-US" dirty="0"/>
+              <a:t>As far as I know</a:t>
+            </a:r>
+          </a:p>
+          <a:p>
+            <a:pPr lvl="1"/>
+            <a:endParaRPr lang="en-US" dirty="0"/>
+          </a:p>
+          <a:p>
+            <a:endParaRPr lang="en-US" dirty="0"/>
+          </a:p>
+        </p:txBody>
+      </p:sp>
+      <p:sp>
+        <p:nvSpPr>
+          <p:cNvPr id="4" name="Slide Number Placeholder 3">
+            <a:extLst>
+              <a:ext uri="{FF2B5EF4-FFF2-40B4-BE49-F238E27FC236}">
+                <a16:creationId xmlns:a16="http://schemas.microsoft.com/office/drawing/2014/main" id="{82571DF2-0EC3-C5F2-A972-558EF54724D7}"/>
+              </a:ext>
+            </a:extLst>
+          </p:cNvPr>
+          <p:cNvSpPr>
+            <a:spLocks noGrp="1"/>
+          </p:cNvSpPr>
+          <p:nvPr>
+            <p:ph type="sldNum" sz="quarter" idx="12"/>
+          </p:nvPr>
+        </p:nvSpPr>
+        <p:spPr/>
+        <p:txBody>
+          <a:bodyPr/>
+          <a:lstStyle/>
+          <a:p>
+            <a:fld id="{629637A9-119A-49DA-BD12-AAC58B377D80}" type="slidenum">
+              <a:rPr lang="en-US" smtClean="0"/>
+              <a:t>63</a:t>
+            </a:fld>
+            <a:endParaRPr lang="en-US" dirty="0"/>
+          </a:p>
+        </p:txBody>
+      </p:sp>
+      <p:pic>
+        <p:nvPicPr>
+          <p:cNvPr id="1028" name="Picture 4" descr="SUMP2.py as a VCD waveform viewer for Xilinx Vivado RTL Simulator – Black  Mesa Labs">
+            <a:extLst>
+              <a:ext uri="{FF2B5EF4-FFF2-40B4-BE49-F238E27FC236}">
+                <a16:creationId xmlns:a16="http://schemas.microsoft.com/office/drawing/2014/main" id="{E8777EFE-2CC4-F538-77CC-FFB37EBB65E6}"/>
+              </a:ext>
+            </a:extLst>
+          </p:cNvPr>
+          <p:cNvPicPr>
+            <a:picLocks noChangeAspect="1" noChangeArrowheads="1"/>
+          </p:cNvPicPr>
+          <p:nvPr/>
+        </p:nvPicPr>
+        <p:blipFill>
+          <a:blip r:embed="rId2">
+            <a:extLst>
+              <a:ext uri="{28A0092B-C50C-407E-A947-70E740481C1C}">
+                <a14:useLocalDpi xmlns:a14="http://schemas.microsoft.com/office/drawing/2010/main" val="0"/>
+              </a:ext>
+            </a:extLst>
+          </a:blip>
+          <a:srcRect/>
+          <a:stretch>
+            <a:fillRect/>
+          </a:stretch>
+        </p:blipFill>
+        <p:spPr bwMode="auto">
+          <a:xfrm>
+            <a:off x="5476378" y="2244417"/>
+            <a:ext cx="6485457" cy="2369166"/>
+          </a:xfrm>
+          <a:prstGeom prst="rect">
+            <a:avLst/>
+          </a:prstGeom>
+          <a:noFill/>
+          <a:extLst>
+            <a:ext uri="{909E8E84-426E-40DD-AFC4-6F175D3DCCD1}">
+              <a14:hiddenFill xmlns:a14="http://schemas.microsoft.com/office/drawing/2010/main">
+                <a:solidFill>
+                  <a:srgbClr val="FFFFFF"/>
+                </a:solidFill>
+              </a14:hiddenFill>
+            </a:ext>
+          </a:extLst>
+        </p:spPr>
+      </p:pic>
+    </p:spTree>
+    <p:extLst>
+      <p:ext uri="{BB962C8B-B14F-4D97-AF65-F5344CB8AC3E}">
+        <p14:creationId xmlns:p14="http://schemas.microsoft.com/office/powerpoint/2010/main" val="370481266"/>
+      </p:ext>
+    </p:extLst>
+  </p:cSld>
+  <p:clrMapOvr>
+    <a:masterClrMapping/>
+  </p:clrMapOvr>
+</p:sld>
+</file>
+
+<file path=ppt/slides/slide64.xml><?xml version="1.0" encoding="utf-8"?>
+<p:sld xmlns:a="http://schemas.openxmlformats.org/drawingml/2006/main" xmlns:r="http://schemas.openxmlformats.org/officeDocument/2006/relationships" xmlns:p="http://schemas.openxmlformats.org/presentationml/2006/main">
+  <p:cSld>
+    <p:spTree>
+      <p:nvGrpSpPr>
+        <p:cNvPr id="1" name=""/>
+        <p:cNvGrpSpPr/>
+        <p:nvPr/>
+      </p:nvGrpSpPr>
+      <p:grpSpPr>
+        <a:xfrm>
+          <a:off x="0" y="0"/>
+          <a:ext cx="0" cy="0"/>
+          <a:chOff x="0" y="0"/>
+          <a:chExt cx="0" cy="0"/>
+        </a:xfrm>
+      </p:grpSpPr>
+      <p:sp>
+        <p:nvSpPr>
+          <p:cNvPr id="2" name="Title 1">
+            <a:extLst>
+              <a:ext uri="{FF2B5EF4-FFF2-40B4-BE49-F238E27FC236}">
+                <a16:creationId xmlns:a16="http://schemas.microsoft.com/office/drawing/2014/main" id="{51F35140-FB42-9357-BFDE-D7B936D8EF11}"/>
+              </a:ext>
+            </a:extLst>
+          </p:cNvPr>
+          <p:cNvSpPr>
+            <a:spLocks noGrp="1"/>
+          </p:cNvSpPr>
+          <p:nvPr>
+            <p:ph type="title"/>
+          </p:nvPr>
+        </p:nvSpPr>
+        <p:spPr/>
+        <p:txBody>
+          <a:bodyPr/>
+          <a:lstStyle/>
+          <a:p>
+            <a:r>
+              <a:rPr lang="en-US" dirty="0"/>
+              <a:t>Viewing Timing Diagrams in this Class</a:t>
+            </a:r>
+          </a:p>
+        </p:txBody>
+      </p:sp>
+      <p:sp>
+        <p:nvSpPr>
+          <p:cNvPr id="3" name="Content Placeholder 2">
+            <a:extLst>
+              <a:ext uri="{FF2B5EF4-FFF2-40B4-BE49-F238E27FC236}">
+                <a16:creationId xmlns:a16="http://schemas.microsoft.com/office/drawing/2014/main" id="{F388B46A-6FE9-430F-7B8A-08D483C01F4F}"/>
+              </a:ext>
+            </a:extLst>
+          </p:cNvPr>
+          <p:cNvSpPr>
+            <a:spLocks noGrp="1"/>
+          </p:cNvSpPr>
+          <p:nvPr>
+            <p:ph idx="1"/>
+          </p:nvPr>
+        </p:nvSpPr>
+        <p:spPr/>
+        <p:txBody>
+          <a:bodyPr/>
+          <a:lstStyle/>
+          <a:p>
+            <a:r>
+              <a:rPr lang="en-US" dirty="0"/>
+              <a:t>Use course package </a:t>
+            </a:r>
+            <a:r>
+              <a:rPr lang="en-US" dirty="0" err="1"/>
+              <a:t>xilinxutils</a:t>
+            </a:r>
+            <a:endParaRPr lang="en-US" dirty="0"/>
+          </a:p>
+          <a:p>
+            <a:pPr lvl="1"/>
+            <a:r>
+              <a:rPr lang="en-US" dirty="0"/>
+              <a:t>Many python utilities for Xilinx tools</a:t>
+            </a:r>
+          </a:p>
+          <a:p>
+            <a:r>
+              <a:rPr lang="en-US" dirty="0"/>
+              <a:t>Demonstrate on simple function demo</a:t>
+            </a:r>
+          </a:p>
+          <a:p>
+            <a:pPr lvl="1"/>
+            <a:r>
+              <a:rPr lang="en-US" dirty="0"/>
+              <a:t>Covered in Unit 2</a:t>
+            </a:r>
+          </a:p>
+          <a:p>
+            <a:r>
+              <a:rPr lang="en-US" dirty="0" err="1"/>
+              <a:t>Sv_sim</a:t>
+            </a:r>
+            <a:r>
+              <a:rPr lang="en-US" dirty="0"/>
+              <a:t> utility:</a:t>
+            </a:r>
+          </a:p>
+          <a:p>
+            <a:pPr lvl="1"/>
+            <a:r>
+              <a:rPr lang="en-US" dirty="0"/>
+              <a:t>Modifies the </a:t>
+            </a:r>
+            <a:r>
+              <a:rPr lang="en-US" dirty="0" err="1"/>
+              <a:t>vitis</a:t>
+            </a:r>
+            <a:r>
+              <a:rPr lang="en-US" dirty="0"/>
+              <a:t> simulation files</a:t>
+            </a:r>
+          </a:p>
+          <a:p>
+            <a:pPr lvl="1"/>
+            <a:r>
+              <a:rPr lang="en-US" dirty="0"/>
+              <a:t>Adds a VCD file</a:t>
+            </a:r>
+          </a:p>
+          <a:p>
+            <a:pPr lvl="1"/>
+            <a:r>
+              <a:rPr lang="en-US" dirty="0"/>
+              <a:t>Creates a </a:t>
+            </a:r>
+            <a:r>
+              <a:rPr lang="en-US" dirty="0" err="1"/>
+              <a:t>dump.vcd</a:t>
+            </a:r>
+            <a:r>
+              <a:rPr lang="en-US" dirty="0"/>
+              <a:t> file</a:t>
+            </a:r>
+          </a:p>
+          <a:p>
+            <a:r>
+              <a:rPr lang="en-US" dirty="0"/>
+              <a:t>In python:</a:t>
+            </a:r>
+          </a:p>
+          <a:p>
+            <a:pPr lvl="1"/>
+            <a:r>
+              <a:rPr lang="en-US" dirty="0"/>
+              <a:t>Load the VCD file</a:t>
+            </a:r>
+          </a:p>
+          <a:p>
+            <a:pPr lvl="1"/>
+            <a:r>
+              <a:rPr lang="en-US" dirty="0"/>
+              <a:t>Use VCD package</a:t>
+            </a:r>
+          </a:p>
+          <a:p>
+            <a:pPr lvl="1"/>
+            <a:endParaRPr lang="en-US" dirty="0"/>
+          </a:p>
+          <a:p>
+            <a:endParaRPr lang="en-US" dirty="0"/>
+          </a:p>
+        </p:txBody>
+      </p:sp>
+      <p:sp>
+        <p:nvSpPr>
+          <p:cNvPr id="4" name="Slide Number Placeholder 3">
+            <a:extLst>
+              <a:ext uri="{FF2B5EF4-FFF2-40B4-BE49-F238E27FC236}">
+                <a16:creationId xmlns:a16="http://schemas.microsoft.com/office/drawing/2014/main" id="{DF27F10F-E3AB-3B0B-E97C-F64951E72835}"/>
+              </a:ext>
+            </a:extLst>
+          </p:cNvPr>
+          <p:cNvSpPr>
+            <a:spLocks noGrp="1"/>
+          </p:cNvSpPr>
+          <p:nvPr>
+            <p:ph type="sldNum" sz="quarter" idx="12"/>
+          </p:nvPr>
+        </p:nvSpPr>
+        <p:spPr/>
+        <p:txBody>
+          <a:bodyPr/>
+          <a:lstStyle/>
+          <a:p>
+            <a:fld id="{629637A9-119A-49DA-BD12-AAC58B377D80}" type="slidenum">
+              <a:rPr lang="en-US" smtClean="0"/>
+              <a:t>64</a:t>
+            </a:fld>
+            <a:endParaRPr lang="en-US" dirty="0"/>
+          </a:p>
+        </p:txBody>
+      </p:sp>
+      <p:pic>
+        <p:nvPicPr>
+          <p:cNvPr id="6" name="Picture 5">
+            <a:extLst>
+              <a:ext uri="{FF2B5EF4-FFF2-40B4-BE49-F238E27FC236}">
+                <a16:creationId xmlns:a16="http://schemas.microsoft.com/office/drawing/2014/main" id="{AD4975B2-CCC8-6F45-52B5-897893A1CF98}"/>
+              </a:ext>
+            </a:extLst>
+          </p:cNvPr>
+          <p:cNvPicPr>
+            <a:picLocks noChangeAspect="1"/>
+          </p:cNvPicPr>
+          <p:nvPr/>
+        </p:nvPicPr>
+        <p:blipFill>
+          <a:blip r:embed="rId2"/>
+          <a:stretch>
+            <a:fillRect/>
+          </a:stretch>
+        </p:blipFill>
+        <p:spPr>
+          <a:xfrm>
+            <a:off x="4821723" y="2936362"/>
+            <a:ext cx="7243485" cy="933112"/>
+          </a:xfrm>
+          <a:prstGeom prst="rect">
+            <a:avLst/>
+          </a:prstGeom>
+        </p:spPr>
+      </p:pic>
+      <p:pic>
+        <p:nvPicPr>
+          <p:cNvPr id="15" name="Picture 14">
+            <a:extLst>
+              <a:ext uri="{FF2B5EF4-FFF2-40B4-BE49-F238E27FC236}">
+                <a16:creationId xmlns:a16="http://schemas.microsoft.com/office/drawing/2014/main" id="{EB729E8B-F47C-517D-95AB-DAEC4FA85DB7}"/>
+              </a:ext>
+            </a:extLst>
+          </p:cNvPr>
+          <p:cNvPicPr>
+            <a:picLocks noChangeAspect="1"/>
+          </p:cNvPicPr>
+          <p:nvPr/>
+        </p:nvPicPr>
+        <p:blipFill>
+          <a:blip r:embed="rId3"/>
+          <a:stretch>
+            <a:fillRect/>
+          </a:stretch>
+        </p:blipFill>
+        <p:spPr>
+          <a:xfrm>
+            <a:off x="5262481" y="4314648"/>
+            <a:ext cx="6677957" cy="1463937"/>
+          </a:xfrm>
+          <a:prstGeom prst="rect">
+            <a:avLst/>
+          </a:prstGeom>
+        </p:spPr>
+      </p:pic>
+      <p:pic>
+        <p:nvPicPr>
+          <p:cNvPr id="5" name="Picture 4">
+            <a:extLst>
+              <a:ext uri="{FF2B5EF4-FFF2-40B4-BE49-F238E27FC236}">
+                <a16:creationId xmlns:a16="http://schemas.microsoft.com/office/drawing/2014/main" id="{EF601300-923C-0071-B1BD-92CD0CF2C98C}"/>
+              </a:ext>
+            </a:extLst>
+          </p:cNvPr>
+          <p:cNvPicPr>
+            <a:picLocks noChangeAspect="1"/>
+          </p:cNvPicPr>
+          <p:nvPr/>
+        </p:nvPicPr>
+        <p:blipFill>
+          <a:blip r:embed="rId4"/>
+          <a:stretch>
+            <a:fillRect/>
+          </a:stretch>
+        </p:blipFill>
+        <p:spPr>
+          <a:xfrm>
+            <a:off x="7961644" y="1461492"/>
+            <a:ext cx="3495855" cy="1552655"/>
+          </a:xfrm>
+          <a:prstGeom prst="rect">
+            <a:avLst/>
+          </a:prstGeom>
+        </p:spPr>
+      </p:pic>
+    </p:spTree>
+    <p:extLst>
+      <p:ext uri="{BB962C8B-B14F-4D97-AF65-F5344CB8AC3E}">
+        <p14:creationId xmlns:p14="http://schemas.microsoft.com/office/powerpoint/2010/main" val="2780278245"/>
+      </p:ext>
+    </p:extLst>
+  </p:cSld>
+  <p:clrMapOvr>
+    <a:masterClrMapping/>
+  </p:clrMapOvr>
+</p:sld>
+</file>
+
+<file path=ppt/slides/slide65.xml><?xml version="1.0" encoding="utf-8"?>
+<p:sld xmlns:a="http://schemas.openxmlformats.org/drawingml/2006/main" xmlns:r="http://schemas.openxmlformats.org/officeDocument/2006/relationships" xmlns:p="http://schemas.openxmlformats.org/presentationml/2006/main">
+  <p:cSld>
+    <p:spTree>
+      <p:nvGrpSpPr>
+        <p:cNvPr id="1" name=""/>
+        <p:cNvGrpSpPr/>
+        <p:nvPr/>
+      </p:nvGrpSpPr>
+      <p:grpSpPr>
+        <a:xfrm>
+          <a:off x="0" y="0"/>
+          <a:ext cx="0" cy="0"/>
+          <a:chOff x="0" y="0"/>
+          <a:chExt cx="0" cy="0"/>
+        </a:xfrm>
+      </p:grpSpPr>
+      <p:sp>
+        <p:nvSpPr>
+          <p:cNvPr id="2" name="Title 1">
+            <a:extLst>
+              <a:ext uri="{FF2B5EF4-FFF2-40B4-BE49-F238E27FC236}">
+                <a16:creationId xmlns:a16="http://schemas.microsoft.com/office/drawing/2014/main" id="{5CC1FC36-3193-8E74-9EAB-60AC5BE087B1}"/>
+              </a:ext>
+            </a:extLst>
+          </p:cNvPr>
+          <p:cNvSpPr>
+            <a:spLocks noGrp="1"/>
+          </p:cNvSpPr>
+          <p:nvPr>
+            <p:ph type="title"/>
+          </p:nvPr>
+        </p:nvSpPr>
+        <p:spPr/>
+        <p:txBody>
+          <a:bodyPr/>
+          <a:lstStyle/>
+          <a:p>
+            <a:r>
+              <a:rPr lang="en-US" dirty="0"/>
+              <a:t>Parsing the Signals in Python</a:t>
+            </a:r>
+          </a:p>
+        </p:txBody>
+      </p:sp>
+      <p:sp>
+        <p:nvSpPr>
+          <p:cNvPr id="3" name="Content Placeholder 2">
+            <a:extLst>
+              <a:ext uri="{FF2B5EF4-FFF2-40B4-BE49-F238E27FC236}">
+                <a16:creationId xmlns:a16="http://schemas.microsoft.com/office/drawing/2014/main" id="{485ACBDC-15F9-94F8-1E71-3762106FCE44}"/>
+              </a:ext>
+            </a:extLst>
+          </p:cNvPr>
+          <p:cNvSpPr>
+            <a:spLocks noGrp="1"/>
+          </p:cNvSpPr>
+          <p:nvPr>
+            <p:ph idx="1"/>
+          </p:nvPr>
+        </p:nvSpPr>
+        <p:spPr/>
+        <p:txBody>
+          <a:bodyPr/>
+          <a:lstStyle/>
+          <a:p>
+            <a:r>
+              <a:rPr lang="en-US" dirty="0"/>
+              <a:t>Create a </a:t>
+            </a:r>
+            <a:r>
+              <a:rPr lang="en-US" dirty="0" err="1"/>
+              <a:t>VcdParser</a:t>
+            </a:r>
+            <a:r>
+              <a:rPr lang="en-US" dirty="0"/>
+              <a:t> object</a:t>
+            </a:r>
+          </a:p>
+          <a:p>
+            <a:r>
+              <a:rPr lang="en-US" dirty="0"/>
+              <a:t>Define signals to parse</a:t>
+            </a:r>
+          </a:p>
+          <a:p>
+            <a:r>
+              <a:rPr lang="en-US" dirty="0"/>
+              <a:t>Add signals to parser</a:t>
+            </a:r>
+          </a:p>
+          <a:p>
+            <a:endParaRPr lang="en-US" dirty="0"/>
+          </a:p>
+        </p:txBody>
+      </p:sp>
+      <p:sp>
+        <p:nvSpPr>
+          <p:cNvPr id="4" name="Slide Number Placeholder 3">
+            <a:extLst>
+              <a:ext uri="{FF2B5EF4-FFF2-40B4-BE49-F238E27FC236}">
+                <a16:creationId xmlns:a16="http://schemas.microsoft.com/office/drawing/2014/main" id="{1607972B-0741-8C81-2EEF-03C51C6C3F15}"/>
+              </a:ext>
+            </a:extLst>
+          </p:cNvPr>
+          <p:cNvSpPr>
+            <a:spLocks noGrp="1"/>
+          </p:cNvSpPr>
+          <p:nvPr>
+            <p:ph type="sldNum" sz="quarter" idx="12"/>
+          </p:nvPr>
+        </p:nvSpPr>
+        <p:spPr/>
+        <p:txBody>
+          <a:bodyPr/>
+          <a:lstStyle/>
+          <a:p>
+            <a:fld id="{629637A9-119A-49DA-BD12-AAC58B377D80}" type="slidenum">
+              <a:rPr lang="en-US" smtClean="0"/>
+              <a:t>65</a:t>
+            </a:fld>
+            <a:endParaRPr lang="en-US" dirty="0"/>
+          </a:p>
+        </p:txBody>
+      </p:sp>
+      <p:pic>
+        <p:nvPicPr>
+          <p:cNvPr id="6" name="Picture 5">
+            <a:extLst>
+              <a:ext uri="{FF2B5EF4-FFF2-40B4-BE49-F238E27FC236}">
+                <a16:creationId xmlns:a16="http://schemas.microsoft.com/office/drawing/2014/main" id="{511B66D9-4295-1232-E848-A056AA2C4A0E}"/>
+              </a:ext>
+            </a:extLst>
+          </p:cNvPr>
+          <p:cNvPicPr>
+            <a:picLocks noChangeAspect="1"/>
+          </p:cNvPicPr>
+          <p:nvPr/>
+        </p:nvPicPr>
+        <p:blipFill>
+          <a:blip r:embed="rId2"/>
+          <a:stretch>
+            <a:fillRect/>
+          </a:stretch>
+        </p:blipFill>
+        <p:spPr>
+          <a:xfrm>
+            <a:off x="6531667" y="2969119"/>
+            <a:ext cx="2081509" cy="2372308"/>
+          </a:xfrm>
+          <a:prstGeom prst="rect">
+            <a:avLst/>
+          </a:prstGeom>
+        </p:spPr>
+      </p:pic>
+      <p:pic>
+        <p:nvPicPr>
+          <p:cNvPr id="8" name="Picture 7">
+            <a:extLst>
+              <a:ext uri="{FF2B5EF4-FFF2-40B4-BE49-F238E27FC236}">
+                <a16:creationId xmlns:a16="http://schemas.microsoft.com/office/drawing/2014/main" id="{58407739-124B-61C7-88E9-A2AE42BEE46A}"/>
+              </a:ext>
+            </a:extLst>
+          </p:cNvPr>
+          <p:cNvPicPr>
+            <a:picLocks noChangeAspect="1"/>
+          </p:cNvPicPr>
+          <p:nvPr/>
+        </p:nvPicPr>
+        <p:blipFill>
+          <a:blip r:embed="rId3"/>
+          <a:stretch>
+            <a:fillRect/>
+          </a:stretch>
+        </p:blipFill>
+        <p:spPr>
+          <a:xfrm>
+            <a:off x="1401090" y="3378736"/>
+            <a:ext cx="4705592" cy="2676663"/>
+          </a:xfrm>
+          <a:prstGeom prst="rect">
+            <a:avLst/>
+          </a:prstGeom>
+        </p:spPr>
+      </p:pic>
+      <p:pic>
+        <p:nvPicPr>
+          <p:cNvPr id="10" name="Picture 9">
+            <a:extLst>
+              <a:ext uri="{FF2B5EF4-FFF2-40B4-BE49-F238E27FC236}">
+                <a16:creationId xmlns:a16="http://schemas.microsoft.com/office/drawing/2014/main" id="{AFADACB7-C8A1-924D-48D2-BAD7C84A3178}"/>
+              </a:ext>
+            </a:extLst>
+          </p:cNvPr>
+          <p:cNvPicPr>
+            <a:picLocks noChangeAspect="1"/>
+          </p:cNvPicPr>
+          <p:nvPr/>
+        </p:nvPicPr>
+        <p:blipFill>
+          <a:blip r:embed="rId4"/>
+          <a:stretch>
+            <a:fillRect/>
+          </a:stretch>
+        </p:blipFill>
+        <p:spPr>
+          <a:xfrm>
+            <a:off x="7548052" y="1370319"/>
+            <a:ext cx="4021800" cy="1071133"/>
+          </a:xfrm>
+          <a:prstGeom prst="rect">
+            <a:avLst/>
+          </a:prstGeom>
+        </p:spPr>
+      </p:pic>
+      <p:cxnSp>
+        <p:nvCxnSpPr>
+          <p:cNvPr id="12" name="Straight Arrow Connector 11">
+            <a:extLst>
+              <a:ext uri="{FF2B5EF4-FFF2-40B4-BE49-F238E27FC236}">
+                <a16:creationId xmlns:a16="http://schemas.microsoft.com/office/drawing/2014/main" id="{E82C1CEF-0B37-31CA-B5C5-9126963203DD}"/>
+              </a:ext>
+            </a:extLst>
+          </p:cNvPr>
+          <p:cNvCxnSpPr>
+            <a:cxnSpLocks/>
+          </p:cNvCxnSpPr>
+          <p:nvPr/>
+        </p:nvCxnSpPr>
+        <p:spPr>
+          <a:xfrm>
+            <a:off x="4061637" y="1701209"/>
+            <a:ext cx="3318167" cy="117652"/>
+          </a:xfrm>
+          <a:prstGeom prst="straightConnector1">
+            <a:avLst/>
+          </a:prstGeom>
+          <a:ln w="25400">
+            <a:tailEnd type="triangle"/>
+          </a:ln>
+        </p:spPr>
+        <p:style>
+          <a:lnRef idx="1">
+            <a:schemeClr val="accent1"/>
+          </a:lnRef>
+          <a:fillRef idx="0">
+            <a:schemeClr val="accent1"/>
+          </a:fillRef>
+          <a:effectRef idx="0">
+            <a:schemeClr val="accent1"/>
+          </a:effectRef>
+          <a:fontRef idx="minor">
+            <a:schemeClr val="tx1"/>
+          </a:fontRef>
+        </p:style>
+      </p:cxnSp>
+      <p:cxnSp>
+        <p:nvCxnSpPr>
+          <p:cNvPr id="14" name="Straight Arrow Connector 13">
+            <a:extLst>
+              <a:ext uri="{FF2B5EF4-FFF2-40B4-BE49-F238E27FC236}">
+                <a16:creationId xmlns:a16="http://schemas.microsoft.com/office/drawing/2014/main" id="{4288DE29-9B3E-6146-F168-104CA42E0A41}"/>
+              </a:ext>
+            </a:extLst>
+          </p:cNvPr>
+          <p:cNvCxnSpPr>
+            <a:cxnSpLocks/>
+          </p:cNvCxnSpPr>
+          <p:nvPr/>
+        </p:nvCxnSpPr>
+        <p:spPr>
+          <a:xfrm>
+            <a:off x="3753886" y="2209386"/>
+            <a:ext cx="2342114" cy="1070527"/>
+          </a:xfrm>
+          <a:prstGeom prst="straightConnector1">
+            <a:avLst/>
+          </a:prstGeom>
+          <a:ln w="25400">
+            <a:tailEnd type="triangle"/>
+          </a:ln>
+        </p:spPr>
+        <p:style>
+          <a:lnRef idx="1">
+            <a:schemeClr val="accent1"/>
+          </a:lnRef>
+          <a:fillRef idx="0">
+            <a:schemeClr val="accent1"/>
+          </a:fillRef>
+          <a:effectRef idx="0">
+            <a:schemeClr val="accent1"/>
+          </a:effectRef>
+          <a:fontRef idx="minor">
+            <a:schemeClr val="tx1"/>
+          </a:fontRef>
+        </p:style>
+      </p:cxnSp>
+      <p:cxnSp>
+        <p:nvCxnSpPr>
+          <p:cNvPr id="15" name="Straight Arrow Connector 14">
+            <a:extLst>
+              <a:ext uri="{FF2B5EF4-FFF2-40B4-BE49-F238E27FC236}">
+                <a16:creationId xmlns:a16="http://schemas.microsoft.com/office/drawing/2014/main" id="{84DD16E4-0BA5-C617-E725-F895D58D8C7B}"/>
+              </a:ext>
+            </a:extLst>
+          </p:cNvPr>
+          <p:cNvCxnSpPr>
+            <a:cxnSpLocks/>
+          </p:cNvCxnSpPr>
+          <p:nvPr/>
+        </p:nvCxnSpPr>
+        <p:spPr>
+          <a:xfrm>
+            <a:off x="2244896" y="2780672"/>
+            <a:ext cx="0" cy="499241"/>
+          </a:xfrm>
+          <a:prstGeom prst="straightConnector1">
+            <a:avLst/>
+          </a:prstGeom>
+          <a:ln w="25400">
+            <a:tailEnd type="triangle"/>
+          </a:ln>
+        </p:spPr>
+        <p:style>
+          <a:lnRef idx="1">
+            <a:schemeClr val="accent1"/>
+          </a:lnRef>
+          <a:fillRef idx="0">
+            <a:schemeClr val="accent1"/>
+          </a:fillRef>
+          <a:effectRef idx="0">
+            <a:schemeClr val="accent1"/>
+          </a:effectRef>
+          <a:fontRef idx="minor">
+            <a:schemeClr val="tx1"/>
+          </a:fontRef>
+        </p:style>
+      </p:cxnSp>
+    </p:spTree>
+    <p:extLst>
+      <p:ext uri="{BB962C8B-B14F-4D97-AF65-F5344CB8AC3E}">
+        <p14:creationId xmlns:p14="http://schemas.microsoft.com/office/powerpoint/2010/main" val="3194583777"/>
+      </p:ext>
+    </p:extLst>
+  </p:cSld>
+  <p:clrMapOvr>
+    <a:masterClrMapping/>
+  </p:clrMapOvr>
+</p:sld>
+</file>
+
+<file path=ppt/slides/slide66.xml><?xml version="1.0" encoding="utf-8"?>
+<p:sld xmlns:a="http://schemas.openxmlformats.org/drawingml/2006/main" xmlns:r="http://schemas.openxmlformats.org/officeDocument/2006/relationships" xmlns:p="http://schemas.openxmlformats.org/presentationml/2006/main">
+  <p:cSld>
+    <p:spTree>
+      <p:nvGrpSpPr>
+        <p:cNvPr id="1" name=""/>
+        <p:cNvGrpSpPr/>
+        <p:nvPr/>
+      </p:nvGrpSpPr>
+      <p:grpSpPr>
+        <a:xfrm>
+          <a:off x="0" y="0"/>
+          <a:ext cx="0" cy="0"/>
+          <a:chOff x="0" y="0"/>
+          <a:chExt cx="0" cy="0"/>
+        </a:xfrm>
+      </p:grpSpPr>
+      <p:sp>
+        <p:nvSpPr>
+          <p:cNvPr id="2" name="Title 1">
+            <a:extLst>
+              <a:ext uri="{FF2B5EF4-FFF2-40B4-BE49-F238E27FC236}">
+                <a16:creationId xmlns:a16="http://schemas.microsoft.com/office/drawing/2014/main" id="{4468082D-C98E-C3E0-610F-49422F9BF389}"/>
+              </a:ext>
+            </a:extLst>
+          </p:cNvPr>
+          <p:cNvSpPr>
+            <a:spLocks noGrp="1"/>
+          </p:cNvSpPr>
+          <p:nvPr>
+            <p:ph type="title"/>
+          </p:nvPr>
+        </p:nvSpPr>
+        <p:spPr/>
+        <p:txBody>
+          <a:bodyPr/>
+          <a:lstStyle/>
+          <a:p>
+            <a:r>
+              <a:rPr lang="en-US" dirty="0"/>
+              <a:t>Displaying the Signals in Python</a:t>
+            </a:r>
+          </a:p>
+        </p:txBody>
+      </p:sp>
+      <p:sp>
+        <p:nvSpPr>
+          <p:cNvPr id="3" name="Content Placeholder 2">
+            <a:extLst>
+              <a:ext uri="{FF2B5EF4-FFF2-40B4-BE49-F238E27FC236}">
+                <a16:creationId xmlns:a16="http://schemas.microsoft.com/office/drawing/2014/main" id="{D5BCEBB8-8C4F-1243-5093-DB4FD52F0632}"/>
+              </a:ext>
+            </a:extLst>
+          </p:cNvPr>
+          <p:cNvSpPr>
+            <a:spLocks noGrp="1"/>
+          </p:cNvSpPr>
+          <p:nvPr>
+            <p:ph idx="1"/>
+          </p:nvPr>
+        </p:nvSpPr>
+        <p:spPr>
+          <a:xfrm>
+            <a:off x="6698974" y="1539277"/>
+            <a:ext cx="4456705" cy="4329817"/>
+          </a:xfrm>
+        </p:spPr>
+        <p:txBody>
+          <a:bodyPr/>
+          <a:lstStyle/>
+          <a:p>
+            <a:r>
+              <a:rPr lang="en-US" dirty="0"/>
+              <a:t>Create a </a:t>
+            </a:r>
+            <a:r>
+              <a:rPr lang="en-US" dirty="0" err="1"/>
+              <a:t>TimingDiagram</a:t>
+            </a:r>
+            <a:r>
+              <a:rPr lang="en-US" dirty="0"/>
+              <a:t> object</a:t>
+            </a:r>
+          </a:p>
+          <a:p>
+            <a:r>
+              <a:rPr lang="en-US" dirty="0"/>
+              <a:t>Add the signals from the parser</a:t>
+            </a:r>
+          </a:p>
+          <a:p>
+            <a:r>
+              <a:rPr lang="en-US" dirty="0"/>
+              <a:t>Plot</a:t>
+            </a:r>
+          </a:p>
+        </p:txBody>
+      </p:sp>
+      <p:sp>
+        <p:nvSpPr>
+          <p:cNvPr id="4" name="Slide Number Placeholder 3">
+            <a:extLst>
+              <a:ext uri="{FF2B5EF4-FFF2-40B4-BE49-F238E27FC236}">
+                <a16:creationId xmlns:a16="http://schemas.microsoft.com/office/drawing/2014/main" id="{F8706FBA-2EAE-C374-F15D-8729DAFA353F}"/>
+              </a:ext>
+            </a:extLst>
+          </p:cNvPr>
+          <p:cNvSpPr>
+            <a:spLocks noGrp="1"/>
+          </p:cNvSpPr>
+          <p:nvPr>
+            <p:ph type="sldNum" sz="quarter" idx="12"/>
+          </p:nvPr>
+        </p:nvSpPr>
+        <p:spPr/>
+        <p:txBody>
+          <a:bodyPr/>
+          <a:lstStyle/>
+          <a:p>
+            <a:fld id="{629637A9-119A-49DA-BD12-AAC58B377D80}" type="slidenum">
+              <a:rPr lang="en-US" smtClean="0"/>
+              <a:t>66</a:t>
+            </a:fld>
+            <a:endParaRPr lang="en-US" dirty="0"/>
+          </a:p>
+        </p:txBody>
+      </p:sp>
+      <p:pic>
+        <p:nvPicPr>
+          <p:cNvPr id="6" name="Picture 5">
+            <a:extLst>
+              <a:ext uri="{FF2B5EF4-FFF2-40B4-BE49-F238E27FC236}">
+                <a16:creationId xmlns:a16="http://schemas.microsoft.com/office/drawing/2014/main" id="{38FBF7E4-9D1D-7A8F-D532-5D5524F61A01}"/>
+              </a:ext>
+            </a:extLst>
+          </p:cNvPr>
+          <p:cNvPicPr>
+            <a:picLocks noChangeAspect="1"/>
+          </p:cNvPicPr>
+          <p:nvPr/>
+        </p:nvPicPr>
+        <p:blipFill>
+          <a:blip r:embed="rId2"/>
+          <a:stretch>
+            <a:fillRect/>
+          </a:stretch>
+        </p:blipFill>
+        <p:spPr>
+          <a:xfrm>
+            <a:off x="822730" y="1628682"/>
+            <a:ext cx="5696243" cy="1800318"/>
+          </a:xfrm>
+          <a:prstGeom prst="rect">
+            <a:avLst/>
+          </a:prstGeom>
+        </p:spPr>
+      </p:pic>
+      <p:pic>
+        <p:nvPicPr>
+          <p:cNvPr id="8" name="Picture 7">
+            <a:extLst>
+              <a:ext uri="{FF2B5EF4-FFF2-40B4-BE49-F238E27FC236}">
+                <a16:creationId xmlns:a16="http://schemas.microsoft.com/office/drawing/2014/main" id="{34DAB411-7A27-E633-4D78-A2D5EFA7BCAB}"/>
+              </a:ext>
+            </a:extLst>
+          </p:cNvPr>
+          <p:cNvPicPr>
+            <a:picLocks noChangeAspect="1"/>
+          </p:cNvPicPr>
+          <p:nvPr/>
+        </p:nvPicPr>
+        <p:blipFill>
+          <a:blip r:embed="rId3"/>
+          <a:stretch>
+            <a:fillRect/>
+          </a:stretch>
+        </p:blipFill>
+        <p:spPr>
+          <a:xfrm>
+            <a:off x="1611281" y="3730868"/>
+            <a:ext cx="8391525" cy="2800350"/>
+          </a:xfrm>
+          <a:prstGeom prst="rect">
+            <a:avLst/>
+          </a:prstGeom>
+        </p:spPr>
+      </p:pic>
+    </p:spTree>
+    <p:extLst>
+      <p:ext uri="{BB962C8B-B14F-4D97-AF65-F5344CB8AC3E}">
+        <p14:creationId xmlns:p14="http://schemas.microsoft.com/office/powerpoint/2010/main" val="3230414771"/>
+      </p:ext>
+    </p:extLst>
+  </p:cSld>
+  <p:clrMapOvr>
+    <a:masterClrMapping/>
+  </p:clrMapOvr>
+</p:sld>
+</file>
+
+<file path=ppt/slides/slide67.xml><?xml version="1.0" encoding="utf-8"?>
+<p:sld xmlns:a="http://schemas.openxmlformats.org/drawingml/2006/main" xmlns:r="http://schemas.openxmlformats.org/officeDocument/2006/relationships" xmlns:p="http://schemas.openxmlformats.org/presentationml/2006/main">
+  <p:cSld>
+    <p:spTree>
+      <p:nvGrpSpPr>
+        <p:cNvPr id="1" name=""/>
+        <p:cNvGrpSpPr/>
+        <p:nvPr/>
+      </p:nvGrpSpPr>
+      <p:grpSpPr>
+        <a:xfrm>
+          <a:off x="0" y="0"/>
+          <a:ext cx="0" cy="0"/>
+          <a:chOff x="0" y="0"/>
+          <a:chExt cx="0" cy="0"/>
+        </a:xfrm>
+      </p:grpSpPr>
+      <p:sp>
+        <p:nvSpPr>
+          <p:cNvPr id="2" name="Title 1">
+            <a:extLst>
+              <a:ext uri="{FF2B5EF4-FFF2-40B4-BE49-F238E27FC236}">
                 <a16:creationId xmlns:a16="http://schemas.microsoft.com/office/drawing/2014/main" id="{F6DDE036-D666-EF45-CD63-FA963274522A}"/>
               </a:ext>
             </a:extLst>
@@ -41308,7 +42366,7 @@
           <a:p>
             <a:fld id="{629637A9-119A-49DA-BD12-AAC58B377D80}" type="slidenum">
               <a:rPr lang="en-US" smtClean="0"/>
-              <a:t>63</a:t>
+              <a:t>67</a:t>
             </a:fld>
             <a:endParaRPr lang="en-US" dirty="0"/>
           </a:p>
@@ -41407,7 +42465,7 @@
     </p:spTree>
     <p:extLst>
       <p:ext uri="{BB962C8B-B14F-4D97-AF65-F5344CB8AC3E}">
-        <p14:creationId xmlns:p14="http://schemas.microsoft.com/office/powerpoint/2010/main" val="1457781380"/>
+        <p14:creationId xmlns:p14="http://schemas.microsoft.com/office/powerpoint/2010/main" val="3457320060"/>
       </p:ext>
     </p:extLst>
   </p:cSld>
@@ -41876,8 +42934,8 @@
           </a:p>
         </p:txBody>
       </p:sp>
-      <mc:AlternateContent xmlns:mc="http://schemas.openxmlformats.org/markup-compatibility/2006">
-        <mc:Choice xmlns:a14="http://schemas.microsoft.com/office/drawing/2010/main" Requires="a14">
+      <mc:AlternateContent xmlns:mc="http://schemas.openxmlformats.org/markup-compatibility/2006" xmlns:a14="http://schemas.microsoft.com/office/drawing/2010/main">
+        <mc:Choice Requires="a14">
           <p:sp>
             <p:nvSpPr>
               <p:cNvPr id="3" name="Content Placeholder 2">
@@ -42196,7 +43254,7 @@
             </p:txBody>
           </p:sp>
         </mc:Choice>
-        <mc:Fallback>
+        <mc:Fallback xmlns="">
           <p:sp>
             <p:nvSpPr>
               <p:cNvPr id="3" name="Content Placeholder 2">
@@ -42893,8 +43951,8 @@
           </a:fontRef>
         </p:style>
       </p:cxnSp>
-      <mc:AlternateContent xmlns:mc="http://schemas.openxmlformats.org/markup-compatibility/2006">
-        <mc:Choice xmlns:a14="http://schemas.microsoft.com/office/drawing/2010/main" Requires="a14">
+      <mc:AlternateContent xmlns:mc="http://schemas.openxmlformats.org/markup-compatibility/2006" xmlns:a14="http://schemas.microsoft.com/office/drawing/2010/main">
+        <mc:Choice Requires="a14">
           <p:sp>
             <p:nvSpPr>
               <p:cNvPr id="24" name="TextBox 23">
@@ -42966,7 +44024,7 @@
             </p:txBody>
           </p:sp>
         </mc:Choice>
-        <mc:Fallback>
+        <mc:Fallback xmlns="">
           <p:sp>
             <p:nvSpPr>
               <p:cNvPr id="24" name="TextBox 23">
@@ -43099,8 +44157,8 @@
           </a:p>
         </p:txBody>
       </p:sp>
-      <mc:AlternateContent xmlns:mc="http://schemas.openxmlformats.org/markup-compatibility/2006">
-        <mc:Choice xmlns:a14="http://schemas.microsoft.com/office/drawing/2010/main" Requires="a14">
+      <mc:AlternateContent xmlns:mc="http://schemas.openxmlformats.org/markup-compatibility/2006" xmlns:a14="http://schemas.microsoft.com/office/drawing/2010/main">
+        <mc:Choice Requires="a14">
           <p:sp>
             <p:nvSpPr>
               <p:cNvPr id="3" name="Content Placeholder 2">
@@ -43246,7 +44304,7 @@
             </p:txBody>
           </p:sp>
         </mc:Choice>
-        <mc:Fallback>
+        <mc:Fallback xmlns="">
           <p:sp>
             <p:nvSpPr>
               <p:cNvPr id="3" name="Content Placeholder 2">
